--- a/assets/powerpoints/module-n1-orientation/E1-je-me-lance.pptx
+++ b/assets/powerpoints/module-n1-orientation/E1-je-me-lance.pptx
@@ -6714,7 +6714,97 @@
                 </a:solidFill>
                 <a:latin typeface="Verdana"/>
               </a:rPr>
-              <a:t>Dans l'activité : &lt;b&gt;devant deux portes&lt;/b&gt; (vous cherchez les toilettes), &lt;b&gt;le service de garde&lt;/b&gt; (vous arrivez avec votre enfant), &lt;b&gt;la porte qui ne s'ouvre pas&lt;/b&gt;. Vous choisissez d'être &lt;b&gt;l'élève&lt;/b&gt; ou &lt;b&gt;la personne du centre&lt;/b&gt;.</a:t>
+              <a:t>Dans l'activité : </a:t>
+            </a:r>
+            <a:r>
+              <a:rPr sz="2000" b="1" i="0">
+                <a:solidFill>
+                  <a:srgbClr val="4B4F52"/>
+                </a:solidFill>
+                <a:latin typeface="Verdana"/>
+              </a:rPr>
+              <a:t>devant deux portes</a:t>
+            </a:r>
+            <a:r>
+              <a:rPr sz="2000" b="0" i="0">
+                <a:solidFill>
+                  <a:srgbClr val="4B4F52"/>
+                </a:solidFill>
+                <a:latin typeface="Verdana"/>
+              </a:rPr>
+              <a:t> (vous cherchez les toilettes), </a:t>
+            </a:r>
+            <a:r>
+              <a:rPr sz="2000" b="1" i="0">
+                <a:solidFill>
+                  <a:srgbClr val="4B4F52"/>
+                </a:solidFill>
+                <a:latin typeface="Verdana"/>
+              </a:rPr>
+              <a:t>le service de garde</a:t>
+            </a:r>
+            <a:r>
+              <a:rPr sz="2000" b="0" i="0">
+                <a:solidFill>
+                  <a:srgbClr val="4B4F52"/>
+                </a:solidFill>
+                <a:latin typeface="Verdana"/>
+              </a:rPr>
+              <a:t> (vous arrivez avec votre enfant), </a:t>
+            </a:r>
+            <a:r>
+              <a:rPr sz="2000" b="1" i="0">
+                <a:solidFill>
+                  <a:srgbClr val="4B4F52"/>
+                </a:solidFill>
+                <a:latin typeface="Verdana"/>
+              </a:rPr>
+              <a:t>la porte qui ne s'ouvre pas</a:t>
+            </a:r>
+            <a:r>
+              <a:rPr sz="2000" b="0" i="0">
+                <a:solidFill>
+                  <a:srgbClr val="4B4F52"/>
+                </a:solidFill>
+                <a:latin typeface="Verdana"/>
+              </a:rPr>
+              <a:t>. Vous choisissez d'être </a:t>
+            </a:r>
+            <a:r>
+              <a:rPr sz="2000" b="1" i="0">
+                <a:solidFill>
+                  <a:srgbClr val="4B4F52"/>
+                </a:solidFill>
+                <a:latin typeface="Verdana"/>
+              </a:rPr>
+              <a:t>l'élève</a:t>
+            </a:r>
+            <a:r>
+              <a:rPr sz="2000" b="0" i="0">
+                <a:solidFill>
+                  <a:srgbClr val="4B4F52"/>
+                </a:solidFill>
+                <a:latin typeface="Verdana"/>
+              </a:rPr>
+              <a:t> ou </a:t>
+            </a:r>
+            <a:r>
+              <a:rPr sz="2000" b="1" i="0">
+                <a:solidFill>
+                  <a:srgbClr val="4B4F52"/>
+                </a:solidFill>
+                <a:latin typeface="Verdana"/>
+              </a:rPr>
+              <a:t>la personne du centre</a:t>
+            </a:r>
+            <a:r>
+              <a:rPr sz="2000" b="0" i="0">
+                <a:solidFill>
+                  <a:srgbClr val="4B4F52"/>
+                </a:solidFill>
+                <a:latin typeface="Verdana"/>
+              </a:rPr>
+              <a:t>.</a:t>
             </a:r>
           </a:p>
         </p:txBody>
@@ -9860,7 +9950,25 @@
                 </a:solidFill>
                 <a:latin typeface="Verdana"/>
               </a:rPr>
-              <a:t>Vous ne vous appelez pas Rosa et votre centre n'est pas le sien. Ce sont les &lt;b&gt;structures&lt;/b&gt; qui se réemploient — « c'est la… », « c'est écrit… » — pas les phrases entières. Regardez vos vraies portes.</a:t>
+              <a:t>Vous ne vous appelez pas Rosa et votre centre n'est pas le sien. Ce sont les </a:t>
+            </a:r>
+            <a:r>
+              <a:rPr sz="2000" b="1" i="0">
+                <a:solidFill>
+                  <a:srgbClr val="4B4F52"/>
+                </a:solidFill>
+                <a:latin typeface="Verdana"/>
+              </a:rPr>
+              <a:t>structures</a:t>
+            </a:r>
+            <a:r>
+              <a:rPr sz="2000" b="0" i="0">
+                <a:solidFill>
+                  <a:srgbClr val="4B4F52"/>
+                </a:solidFill>
+                <a:latin typeface="Verdana"/>
+              </a:rPr>
+              <a:t> qui se réemploient — « c'est la… », « c'est écrit… » — pas les phrases entières. Regardez vos vraies portes.</a:t>
             </a:r>
           </a:p>
         </p:txBody>
